--- a/adpro/uber-presentation.pptx
+++ b/adpro/uber-presentation.pptx
@@ -2559,7 +2559,7 @@
         <p:spPr>
           <a:xfrm>
             <a:off x="566928" y="5010912"/>
-            <a:ext cx="3381146" cy="1234440"/>
+            <a:ext cx="3381146" cy="1097280"/>
           </a:xfrm>
           <a:prstGeom prst="rect">
             <a:avLst/>
@@ -2640,7 +2640,7 @@
         <p:spPr>
           <a:xfrm>
             <a:off x="4405274" y="5010912"/>
-            <a:ext cx="3381146" cy="1234440"/>
+            <a:ext cx="3381146" cy="1097280"/>
           </a:xfrm>
           <a:prstGeom prst="rect">
             <a:avLst/>
@@ -2721,7 +2721,7 @@
         <p:spPr>
           <a:xfrm>
             <a:off x="8243621" y="5010912"/>
-            <a:ext cx="3381146" cy="1234440"/>
+            <a:ext cx="3381146" cy="1097280"/>
           </a:xfrm>
           <a:prstGeom prst="rect">
             <a:avLst/>
@@ -2762,7 +2762,7 @@
         </p:nvSpPr>
         <p:spPr>
           <a:xfrm>
-            <a:off x="566928" y="6382512"/>
+            <a:off x="566928" y="6181344"/>
             <a:ext cx="4572000" cy="219456"/>
           </a:xfrm>
           <a:prstGeom prst="rect">
@@ -2801,7 +2801,7 @@
         </p:nvSpPr>
         <p:spPr>
           <a:xfrm>
-            <a:off x="10527487" y="6382512"/>
+            <a:off x="10527487" y="6181344"/>
             <a:ext cx="1097280" cy="219456"/>
           </a:xfrm>
           <a:prstGeom prst="rect">
@@ -3748,16 +3748,16 @@
         <p:spPr>
           <a:xfrm>
             <a:off x="5394960" y="5532120"/>
-            <a:ext cx="5760720" cy="777240"/>
-          </a:xfrm>
-          <a:prstGeom prst="rect">
-            <a:avLst/>
-          </a:prstGeom>
-          <a:noFill/>
-          <a:ln/>
-        </p:spPr>
-        <p:txBody>
-          <a:bodyPr wrap="square" lIns="0" tIns="0" rIns="0" bIns="0" rtlCol="0" anchor="ctr"/>
+            <a:ext cx="5760720" cy="566928"/>
+          </a:xfrm>
+          <a:prstGeom prst="rect">
+            <a:avLst/>
+          </a:prstGeom>
+          <a:noFill/>
+          <a:ln/>
+        </p:spPr>
+        <p:txBody>
+          <a:bodyPr wrap="square" lIns="0" tIns="0" rIns="0" bIns="0" rtlCol="0" anchor="t"/>
           <a:lstStyle/>
           <a:p>
             <a:pPr indent="0" marL="0">
@@ -3789,7 +3789,7 @@
         </p:nvSpPr>
         <p:spPr>
           <a:xfrm>
-            <a:off x="566928" y="6382512"/>
+            <a:off x="566928" y="6181344"/>
             <a:ext cx="4572000" cy="219456"/>
           </a:xfrm>
           <a:prstGeom prst="rect">
@@ -3828,7 +3828,7 @@
         </p:nvSpPr>
         <p:spPr>
           <a:xfrm>
-            <a:off x="10527487" y="6382512"/>
+            <a:off x="10527487" y="6181344"/>
             <a:ext cx="1097280" cy="219456"/>
           </a:xfrm>
           <a:prstGeom prst="rect">
@@ -5026,7 +5026,7 @@
         </p:nvSpPr>
         <p:spPr>
           <a:xfrm>
-            <a:off x="566928" y="6382512"/>
+            <a:off x="566928" y="6181344"/>
             <a:ext cx="4572000" cy="219456"/>
           </a:xfrm>
           <a:prstGeom prst="rect">
@@ -5065,7 +5065,7 @@
         </p:nvSpPr>
         <p:spPr>
           <a:xfrm>
-            <a:off x="10527487" y="6382512"/>
+            <a:off x="10527487" y="6181344"/>
             <a:ext cx="1097280" cy="219456"/>
           </a:xfrm>
           <a:prstGeom prst="rect">
@@ -5758,8 +5758,8 @@
         </p:nvSpPr>
         <p:spPr>
           <a:xfrm>
-            <a:off x="566928" y="5742432"/>
-            <a:ext cx="7955280" cy="566928"/>
+            <a:off x="566928" y="5577840"/>
+            <a:ext cx="7955280" cy="530352"/>
           </a:xfrm>
           <a:prstGeom prst="rect">
             <a:avLst/>
@@ -5800,7 +5800,7 @@
         </p:nvSpPr>
         <p:spPr>
           <a:xfrm>
-            <a:off x="566928" y="6382512"/>
+            <a:off x="566928" y="6181344"/>
             <a:ext cx="4572000" cy="219456"/>
           </a:xfrm>
           <a:prstGeom prst="rect">
@@ -5839,7 +5839,7 @@
         </p:nvSpPr>
         <p:spPr>
           <a:xfrm>
-            <a:off x="10527487" y="6382512"/>
+            <a:off x="10527487" y="6181344"/>
             <a:ext cx="1097280" cy="219456"/>
           </a:xfrm>
           <a:prstGeom prst="rect">
@@ -6541,8 +6541,8 @@
         </p:nvSpPr>
         <p:spPr>
           <a:xfrm>
-            <a:off x="566928" y="5989320"/>
-            <a:ext cx="11057839" cy="274320"/>
+            <a:off x="566928" y="5870448"/>
+            <a:ext cx="11057839" cy="310896"/>
           </a:xfrm>
           <a:prstGeom prst="rect">
             <a:avLst/>
@@ -6580,7 +6580,7 @@
         </p:nvSpPr>
         <p:spPr>
           <a:xfrm>
-            <a:off x="566928" y="6382512"/>
+            <a:off x="566928" y="6181344"/>
             <a:ext cx="4572000" cy="219456"/>
           </a:xfrm>
           <a:prstGeom prst="rect">
@@ -6619,7 +6619,7 @@
         </p:nvSpPr>
         <p:spPr>
           <a:xfrm>
-            <a:off x="10527487" y="6382512"/>
+            <a:off x="10527487" y="6181344"/>
             <a:ext cx="1097280" cy="219456"/>
           </a:xfrm>
           <a:prstGeom prst="rect">
@@ -6874,7 +6874,7 @@
             <a:r>
               <a:rPr lang="en-US" sz="1100" dirty="0">
                 <a:solidFill>
-                  <a:srgbClr val="6BA3E8"/>
+                  <a:srgbClr val="B9CCE4"/>
                 </a:solidFill>
                 <a:latin typeface="Arial" pitchFamily="34" charset="0"/>
                 <a:ea typeface="Arial" pitchFamily="34" charset="-122"/>
@@ -7463,7 +7463,7 @@
         </p:nvSpPr>
         <p:spPr>
           <a:xfrm>
-            <a:off x="566928" y="6382512"/>
+            <a:off x="566928" y="6181344"/>
             <a:ext cx="4572000" cy="219456"/>
           </a:xfrm>
           <a:prstGeom prst="rect">
@@ -7502,7 +7502,7 @@
         </p:nvSpPr>
         <p:spPr>
           <a:xfrm>
-            <a:off x="10527487" y="6382512"/>
+            <a:off x="10527487" y="6181344"/>
             <a:ext cx="1097280" cy="219456"/>
           </a:xfrm>
           <a:prstGeom prst="rect">
@@ -7687,7 +7687,7 @@
         </p:nvSpPr>
         <p:spPr>
           <a:xfrm>
-            <a:off x="566928" y="4617720"/>
+            <a:off x="566928" y="4480560"/>
             <a:ext cx="3381146" cy="256032"/>
           </a:xfrm>
           <a:prstGeom prst="rect">
@@ -7726,8 +7726,8 @@
         </p:nvSpPr>
         <p:spPr>
           <a:xfrm>
-            <a:off x="566928" y="4873752"/>
-            <a:ext cx="3381146" cy="512064"/>
+            <a:off x="566928" y="4736592"/>
+            <a:ext cx="3381146" cy="457200"/>
           </a:xfrm>
           <a:prstGeom prst="rect">
             <a:avLst/>
@@ -7768,7 +7768,7 @@
         </p:nvSpPr>
         <p:spPr>
           <a:xfrm>
-            <a:off x="4405274" y="4617720"/>
+            <a:off x="4405274" y="4480560"/>
             <a:ext cx="3381146" cy="256032"/>
           </a:xfrm>
           <a:prstGeom prst="rect">
@@ -7807,8 +7807,8 @@
         </p:nvSpPr>
         <p:spPr>
           <a:xfrm>
-            <a:off x="4405274" y="4873752"/>
-            <a:ext cx="3381146" cy="512064"/>
+            <a:off x="4405274" y="4736592"/>
+            <a:ext cx="3381146" cy="457200"/>
           </a:xfrm>
           <a:prstGeom prst="rect">
             <a:avLst/>
@@ -7849,7 +7849,7 @@
         </p:nvSpPr>
         <p:spPr>
           <a:xfrm>
-            <a:off x="8243621" y="4617720"/>
+            <a:off x="8243621" y="4480560"/>
             <a:ext cx="3381146" cy="256032"/>
           </a:xfrm>
           <a:prstGeom prst="rect">
@@ -7888,8 +7888,8 @@
         </p:nvSpPr>
         <p:spPr>
           <a:xfrm>
-            <a:off x="8243621" y="4873752"/>
-            <a:ext cx="3381146" cy="512064"/>
+            <a:off x="8243621" y="4736592"/>
+            <a:ext cx="3381146" cy="457200"/>
           </a:xfrm>
           <a:prstGeom prst="rect">
             <a:avLst/>
@@ -7930,7 +7930,7 @@
         </p:nvSpPr>
         <p:spPr>
           <a:xfrm>
-            <a:off x="566928" y="5486400"/>
+            <a:off x="566928" y="5349240"/>
             <a:ext cx="3381146" cy="256032"/>
           </a:xfrm>
           <a:prstGeom prst="rect">
@@ -7969,8 +7969,8 @@
         </p:nvSpPr>
         <p:spPr>
           <a:xfrm>
-            <a:off x="566928" y="5742432"/>
-            <a:ext cx="3381146" cy="512064"/>
+            <a:off x="566928" y="5605272"/>
+            <a:ext cx="3381146" cy="457200"/>
           </a:xfrm>
           <a:prstGeom prst="rect">
             <a:avLst/>
@@ -8011,7 +8011,7 @@
         </p:nvSpPr>
         <p:spPr>
           <a:xfrm>
-            <a:off x="4405274" y="5486400"/>
+            <a:off x="4405274" y="5349240"/>
             <a:ext cx="3381146" cy="256032"/>
           </a:xfrm>
           <a:prstGeom prst="rect">
@@ -8050,8 +8050,8 @@
         </p:nvSpPr>
         <p:spPr>
           <a:xfrm>
-            <a:off x="4405274" y="5742432"/>
-            <a:ext cx="3381146" cy="512064"/>
+            <a:off x="4405274" y="5605272"/>
+            <a:ext cx="3381146" cy="457200"/>
           </a:xfrm>
           <a:prstGeom prst="rect">
             <a:avLst/>
@@ -8092,7 +8092,7 @@
         </p:nvSpPr>
         <p:spPr>
           <a:xfrm>
-            <a:off x="8243621" y="5486400"/>
+            <a:off x="8243621" y="5349240"/>
             <a:ext cx="3381146" cy="256032"/>
           </a:xfrm>
           <a:prstGeom prst="rect">
@@ -8131,8 +8131,8 @@
         </p:nvSpPr>
         <p:spPr>
           <a:xfrm>
-            <a:off x="8243621" y="5742432"/>
-            <a:ext cx="3381146" cy="512064"/>
+            <a:off x="8243621" y="5605272"/>
+            <a:ext cx="3381146" cy="457200"/>
           </a:xfrm>
           <a:prstGeom prst="rect">
             <a:avLst/>
@@ -8173,7 +8173,7 @@
         </p:nvSpPr>
         <p:spPr>
           <a:xfrm>
-            <a:off x="566928" y="6327648"/>
+            <a:off x="566928" y="6126480"/>
             <a:ext cx="11057839" cy="274320"/>
           </a:xfrm>
           <a:prstGeom prst="rect">
